--- a/instructor/slides/pptx/lectures/L44.pptx
+++ b/instructor/slides/pptx/lectures/L44.pptx
@@ -4091,8 +4091,8 @@
         </p:nvSpPr>
         <p:spPr>
           <a:xfrm>
-            <a:off x="640080" y="1920240"/>
-            <a:ext cx="10972800" cy="1463040"/>
+            <a:off x="640080" y="1828800"/>
+            <a:ext cx="6675120" cy="1645920"/>
           </a:xfrm>
           <a:prstGeom prst="rect">
             <a:avLst/>
@@ -4106,7 +4106,7 @@
           <a:lstStyle/>
           <a:p>
             <a:r>
-              <a:rPr sz="4400" b="1">
+              <a:rPr sz="4000" b="1">
                 <a:solidFill>
                   <a:srgbClr val="FFFFFF"/>
                 </a:solidFill>
@@ -4125,8 +4125,8 @@
         </p:nvSpPr>
         <p:spPr>
           <a:xfrm>
-            <a:off x="640080" y="3657600"/>
-            <a:ext cx="10789920" cy="1097280"/>
+            <a:off x="640080" y="3794760"/>
+            <a:ext cx="6675120" cy="1097280"/>
           </a:xfrm>
           <a:prstGeom prst="rect">
             <a:avLst/>
@@ -4140,7 +4140,7 @@
           <a:lstStyle/>
           <a:p>
             <a:r>
-              <a:rPr sz="2000" b="0">
+              <a:rPr sz="1800" b="0">
                 <a:solidFill>
                   <a:srgbClr val="B7CBDE"/>
                 </a:solidFill>
@@ -4159,8 +4159,8 @@
         </p:nvSpPr>
         <p:spPr>
           <a:xfrm>
-            <a:off x="640080" y="5029200"/>
-            <a:ext cx="10972800" cy="457200"/>
+            <a:off x="640080" y="5120640"/>
+            <a:ext cx="6766560" cy="457200"/>
           </a:xfrm>
           <a:prstGeom prst="rect">
             <a:avLst/>
@@ -4174,7 +4174,7 @@
           <a:lstStyle/>
           <a:p>
             <a:r>
-              <a:rPr sz="1600" b="0">
+              <a:rPr sz="1500" b="0">
                 <a:solidFill>
                   <a:srgbClr val="3EC6FF"/>
                 </a:solidFill>
@@ -4185,6 +4185,30 @@
           </a:p>
         </p:txBody>
       </p:sp>
+      <p:pic>
+        <p:nvPicPr>
+          <p:cNvPr id="7" name="Picture 6" descr="dw-recursion.jpg"/>
+          <p:cNvPicPr>
+            <a:picLocks noChangeAspect="1"/>
+          </p:cNvPicPr>
+          <p:nvPr/>
+        </p:nvPicPr>
+        <p:blipFill>
+          <a:blip r:embed="rId2"/>
+          <a:stretch>
+            <a:fillRect/>
+          </a:stretch>
+        </p:blipFill>
+        <p:spPr>
+          <a:xfrm>
+            <a:off x="7452360" y="1325880"/>
+            <a:ext cx="4160520" cy="4160520"/>
+          </a:xfrm>
+          <a:prstGeom prst="rect">
+            <a:avLst/>
+          </a:prstGeom>
+        </p:spPr>
+      </p:pic>
     </p:spTree>
   </p:cSld>
   <p:clrMapOvr>
@@ -4288,8 +4312,8 @@
         </p:nvSpPr>
         <p:spPr>
           <a:xfrm>
-            <a:off x="640080" y="685800"/>
-            <a:ext cx="10972800" cy="1463040"/>
+            <a:off x="640080" y="658368"/>
+            <a:ext cx="7863840" cy="1645920"/>
           </a:xfrm>
           <a:prstGeom prst="rect">
             <a:avLst/>
@@ -4303,7 +4327,7 @@
           <a:lstStyle/>
           <a:p>
             <a:r>
-              <a:rPr sz="3200" b="1">
+              <a:rPr sz="3000" b="1">
                 <a:solidFill>
                   <a:srgbClr val="FFFFFF"/>
                 </a:solidFill>
@@ -4322,8 +4346,8 @@
         </p:nvSpPr>
         <p:spPr>
           <a:xfrm>
-            <a:off x="777240" y="2286000"/>
-            <a:ext cx="10607040" cy="4754880"/>
+            <a:off x="777240" y="2331720"/>
+            <a:ext cx="7498079" cy="4754880"/>
           </a:xfrm>
           <a:prstGeom prst="rect">
             <a:avLst/>
@@ -4342,7 +4366,7 @@
               </a:spcAft>
             </a:pPr>
             <a:r>
-              <a:rPr sz="2400" b="0">
+              <a:rPr sz="2200" b="0">
                 <a:solidFill>
                   <a:srgbClr val="FFFFFF"/>
                 </a:solidFill>
@@ -4353,6 +4377,30 @@
           </a:p>
         </p:txBody>
       </p:sp>
+      <p:pic>
+        <p:nvPicPr>
+          <p:cNvPr id="6" name="Picture 5" descr="dw-recursion.jpg"/>
+          <p:cNvPicPr>
+            <a:picLocks noChangeAspect="1"/>
+          </p:cNvPicPr>
+          <p:nvPr/>
+        </p:nvPicPr>
+        <p:blipFill>
+          <a:blip r:embed="rId2"/>
+          <a:stretch>
+            <a:fillRect/>
+          </a:stretch>
+        </p:blipFill>
+        <p:spPr>
+          <a:xfrm>
+            <a:off x="8732520" y="2057400"/>
+            <a:ext cx="2880360" cy="2880360"/>
+          </a:xfrm>
+          <a:prstGeom prst="rect">
+            <a:avLst/>
+          </a:prstGeom>
+        </p:spPr>
+      </p:pic>
     </p:spTree>
   </p:cSld>
   <p:clrMapOvr>
@@ -4456,8 +4504,8 @@
         </p:nvSpPr>
         <p:spPr>
           <a:xfrm>
-            <a:off x="640080" y="685800"/>
-            <a:ext cx="10972800" cy="1463040"/>
+            <a:off x="640080" y="658368"/>
+            <a:ext cx="7863840" cy="1645920"/>
           </a:xfrm>
           <a:prstGeom prst="rect">
             <a:avLst/>
@@ -4471,7 +4519,7 @@
           <a:lstStyle/>
           <a:p>
             <a:r>
-              <a:rPr sz="3200" b="1">
+              <a:rPr sz="3000" b="1">
                 <a:solidFill>
                   <a:srgbClr val="FFFFFF"/>
                 </a:solidFill>
@@ -4490,8 +4538,8 @@
         </p:nvSpPr>
         <p:spPr>
           <a:xfrm>
-            <a:off x="777240" y="2286000"/>
-            <a:ext cx="10607040" cy="4754880"/>
+            <a:off x="777240" y="2331720"/>
+            <a:ext cx="7498079" cy="4754880"/>
           </a:xfrm>
           <a:prstGeom prst="rect">
             <a:avLst/>
@@ -4510,7 +4558,7 @@
               </a:spcAft>
             </a:pPr>
             <a:r>
-              <a:rPr sz="2400" b="0">
+              <a:rPr sz="2200" b="0">
                 <a:solidFill>
                   <a:srgbClr val="FFFFFF"/>
                 </a:solidFill>
@@ -4521,6 +4569,30 @@
           </a:p>
         </p:txBody>
       </p:sp>
+      <p:pic>
+        <p:nvPicPr>
+          <p:cNvPr id="6" name="Picture 5" descr="dw-recursion.jpg"/>
+          <p:cNvPicPr>
+            <a:picLocks noChangeAspect="1"/>
+          </p:cNvPicPr>
+          <p:nvPr/>
+        </p:nvPicPr>
+        <p:blipFill>
+          <a:blip r:embed="rId2"/>
+          <a:stretch>
+            <a:fillRect/>
+          </a:stretch>
+        </p:blipFill>
+        <p:spPr>
+          <a:xfrm>
+            <a:off x="8732520" y="2057400"/>
+            <a:ext cx="2880360" cy="2880360"/>
+          </a:xfrm>
+          <a:prstGeom prst="rect">
+            <a:avLst/>
+          </a:prstGeom>
+        </p:spPr>
+      </p:pic>
     </p:spTree>
   </p:cSld>
   <p:clrMapOvr>
@@ -4624,8 +4696,8 @@
         </p:nvSpPr>
         <p:spPr>
           <a:xfrm>
-            <a:off x="640080" y="685800"/>
-            <a:ext cx="10972800" cy="1463040"/>
+            <a:off x="640080" y="658368"/>
+            <a:ext cx="10972800" cy="1645920"/>
           </a:xfrm>
           <a:prstGeom prst="rect">
             <a:avLst/>
@@ -4639,7 +4711,7 @@
           <a:lstStyle/>
           <a:p>
             <a:r>
-              <a:rPr sz="3200" b="1">
+              <a:rPr sz="3000" b="1">
                 <a:solidFill>
                   <a:srgbClr val="FFFFFF"/>
                 </a:solidFill>
@@ -4953,8 +5025,8 @@
         </p:nvSpPr>
         <p:spPr>
           <a:xfrm>
-            <a:off x="640080" y="685800"/>
-            <a:ext cx="10972800" cy="1463040"/>
+            <a:off x="640080" y="658368"/>
+            <a:ext cx="7863840" cy="1645920"/>
           </a:xfrm>
           <a:prstGeom prst="rect">
             <a:avLst/>
@@ -4968,7 +5040,7 @@
           <a:lstStyle/>
           <a:p>
             <a:r>
-              <a:rPr sz="3200" b="1">
+              <a:rPr sz="3000" b="1">
                 <a:solidFill>
                   <a:srgbClr val="FFFFFF"/>
                 </a:solidFill>
@@ -4987,8 +5059,8 @@
         </p:nvSpPr>
         <p:spPr>
           <a:xfrm>
-            <a:off x="777240" y="2286000"/>
-            <a:ext cx="10607040" cy="4754880"/>
+            <a:off x="777240" y="2331720"/>
+            <a:ext cx="7498079" cy="4754880"/>
           </a:xfrm>
           <a:prstGeom prst="rect">
             <a:avLst/>
@@ -5007,7 +5079,7 @@
               </a:spcAft>
             </a:pPr>
             <a:r>
-              <a:rPr sz="2400" b="0">
+              <a:rPr sz="2200" b="0">
                 <a:solidFill>
                   <a:srgbClr val="FFFFFF"/>
                 </a:solidFill>
@@ -5018,6 +5090,30 @@
           </a:p>
         </p:txBody>
       </p:sp>
+      <p:pic>
+        <p:nvPicPr>
+          <p:cNvPr id="6" name="Picture 5" descr="dw-recursion.jpg"/>
+          <p:cNvPicPr>
+            <a:picLocks noChangeAspect="1"/>
+          </p:cNvPicPr>
+          <p:nvPr/>
+        </p:nvPicPr>
+        <p:blipFill>
+          <a:blip r:embed="rId2"/>
+          <a:stretch>
+            <a:fillRect/>
+          </a:stretch>
+        </p:blipFill>
+        <p:spPr>
+          <a:xfrm>
+            <a:off x="8732520" y="2057400"/>
+            <a:ext cx="2880360" cy="2880360"/>
+          </a:xfrm>
+          <a:prstGeom prst="rect">
+            <a:avLst/>
+          </a:prstGeom>
+        </p:spPr>
+      </p:pic>
     </p:spTree>
   </p:cSld>
   <p:clrMapOvr>
@@ -5121,8 +5217,8 @@
         </p:nvSpPr>
         <p:spPr>
           <a:xfrm>
-            <a:off x="640080" y="685800"/>
-            <a:ext cx="10972800" cy="1463040"/>
+            <a:off x="640080" y="658368"/>
+            <a:ext cx="10972800" cy="1645920"/>
           </a:xfrm>
           <a:prstGeom prst="rect">
             <a:avLst/>
@@ -5136,7 +5232,7 @@
           <a:lstStyle/>
           <a:p>
             <a:r>
-              <a:rPr sz="3200" b="1">
+              <a:rPr sz="3000" b="1">
                 <a:solidFill>
                   <a:srgbClr val="FFFFFF"/>
                 </a:solidFill>
@@ -5450,8 +5546,8 @@
         </p:nvSpPr>
         <p:spPr>
           <a:xfrm>
-            <a:off x="640080" y="685800"/>
-            <a:ext cx="10972800" cy="1463040"/>
+            <a:off x="640080" y="658368"/>
+            <a:ext cx="7863840" cy="1645920"/>
           </a:xfrm>
           <a:prstGeom prst="rect">
             <a:avLst/>
@@ -5465,7 +5561,7 @@
           <a:lstStyle/>
           <a:p>
             <a:r>
-              <a:rPr sz="3200" b="1">
+              <a:rPr sz="3000" b="1">
                 <a:solidFill>
                   <a:srgbClr val="FFFFFF"/>
                 </a:solidFill>
@@ -5484,8 +5580,8 @@
         </p:nvSpPr>
         <p:spPr>
           <a:xfrm>
-            <a:off x="777240" y="2286000"/>
-            <a:ext cx="10607040" cy="4754880"/>
+            <a:off x="777240" y="2331720"/>
+            <a:ext cx="7498079" cy="4754880"/>
           </a:xfrm>
           <a:prstGeom prst="rect">
             <a:avLst/>
@@ -5504,7 +5600,7 @@
               </a:spcAft>
             </a:pPr>
             <a:r>
-              <a:rPr sz="2400" b="0">
+              <a:rPr sz="2200" b="0">
                 <a:solidFill>
                   <a:srgbClr val="FFFFFF"/>
                 </a:solidFill>
@@ -5515,6 +5611,30 @@
           </a:p>
         </p:txBody>
       </p:sp>
+      <p:pic>
+        <p:nvPicPr>
+          <p:cNvPr id="6" name="Picture 5" descr="dw-recursion.jpg"/>
+          <p:cNvPicPr>
+            <a:picLocks noChangeAspect="1"/>
+          </p:cNvPicPr>
+          <p:nvPr/>
+        </p:nvPicPr>
+        <p:blipFill>
+          <a:blip r:embed="rId2"/>
+          <a:stretch>
+            <a:fillRect/>
+          </a:stretch>
+        </p:blipFill>
+        <p:spPr>
+          <a:xfrm>
+            <a:off x="8732520" y="2057400"/>
+            <a:ext cx="2880360" cy="2880360"/>
+          </a:xfrm>
+          <a:prstGeom prst="rect">
+            <a:avLst/>
+          </a:prstGeom>
+        </p:spPr>
+      </p:pic>
     </p:spTree>
   </p:cSld>
   <p:clrMapOvr>
@@ -5618,8 +5738,8 @@
         </p:nvSpPr>
         <p:spPr>
           <a:xfrm>
-            <a:off x="640080" y="685800"/>
-            <a:ext cx="10972800" cy="1463040"/>
+            <a:off x="640080" y="658368"/>
+            <a:ext cx="10972800" cy="1645920"/>
           </a:xfrm>
           <a:prstGeom prst="rect">
             <a:avLst/>
@@ -5633,7 +5753,7 @@
           <a:lstStyle/>
           <a:p>
             <a:r>
-              <a:rPr sz="3200" b="1">
+              <a:rPr sz="3000" b="1">
                 <a:solidFill>
                   <a:srgbClr val="FFFFFF"/>
                 </a:solidFill>
@@ -5851,8 +5971,8 @@
         </p:nvSpPr>
         <p:spPr>
           <a:xfrm>
-            <a:off x="640080" y="685800"/>
-            <a:ext cx="10972800" cy="1463040"/>
+            <a:off x="640080" y="658368"/>
+            <a:ext cx="7863840" cy="1645920"/>
           </a:xfrm>
           <a:prstGeom prst="rect">
             <a:avLst/>
@@ -5866,7 +5986,7 @@
           <a:lstStyle/>
           <a:p>
             <a:r>
-              <a:rPr sz="3200" b="1">
+              <a:rPr sz="3000" b="1">
                 <a:solidFill>
                   <a:srgbClr val="FFFFFF"/>
                 </a:solidFill>
@@ -5885,8 +6005,8 @@
         </p:nvSpPr>
         <p:spPr>
           <a:xfrm>
-            <a:off x="777240" y="2286000"/>
-            <a:ext cx="10607040" cy="4754880"/>
+            <a:off x="777240" y="2331720"/>
+            <a:ext cx="7498079" cy="4754880"/>
           </a:xfrm>
           <a:prstGeom prst="rect">
             <a:avLst/>
@@ -5905,7 +6025,7 @@
               </a:spcAft>
             </a:pPr>
             <a:r>
-              <a:rPr sz="2400" b="0">
+              <a:rPr sz="2200" b="0">
                 <a:solidFill>
                   <a:srgbClr val="FFFFFF"/>
                 </a:solidFill>
@@ -5916,6 +6036,30 @@
           </a:p>
         </p:txBody>
       </p:sp>
+      <p:pic>
+        <p:nvPicPr>
+          <p:cNvPr id="6" name="Picture 5" descr="dw-recursion.jpg"/>
+          <p:cNvPicPr>
+            <a:picLocks noChangeAspect="1"/>
+          </p:cNvPicPr>
+          <p:nvPr/>
+        </p:nvPicPr>
+        <p:blipFill>
+          <a:blip r:embed="rId2"/>
+          <a:stretch>
+            <a:fillRect/>
+          </a:stretch>
+        </p:blipFill>
+        <p:spPr>
+          <a:xfrm>
+            <a:off x="8732520" y="2057400"/>
+            <a:ext cx="2880360" cy="2880360"/>
+          </a:xfrm>
+          <a:prstGeom prst="rect">
+            <a:avLst/>
+          </a:prstGeom>
+        </p:spPr>
+      </p:pic>
     </p:spTree>
   </p:cSld>
   <p:clrMapOvr>
